--- a/Main/Study/First Sem/All Notes and Resources Combined/AOS Notes/Unit 4.2-Chapter 9 (Real time System).pptx
+++ b/Main/Study/First Sem/All Notes and Resources Combined/AOS Notes/Unit 4.2-Chapter 9 (Real time System).pptx
@@ -256,22 +256,82 @@
   </pc:docChgLst>
   <pc:docChgLst>
     <pc:chgData name="Yujan Basnet" userId="495fd8277ebfbaef" providerId="LiveId" clId="{992D80D9-0300-4A30-8838-15E503452DEA}"/>
-    <pc:docChg chg="modSld">
-      <pc:chgData name="Yujan Basnet" userId="495fd8277ebfbaef" providerId="LiveId" clId="{992D80D9-0300-4A30-8838-15E503452DEA}" dt="2025-06-06T01:49:22.459" v="0" actId="207"/>
+    <pc:docChg chg="undo custSel modSld">
+      <pc:chgData name="Yujan Basnet" userId="495fd8277ebfbaef" providerId="LiveId" clId="{992D80D9-0300-4A30-8838-15E503452DEA}" dt="2025-06-18T10:50:01.728" v="15" actId="207"/>
       <pc:docMkLst>
         <pc:docMk/>
       </pc:docMkLst>
       <pc:sldChg chg="modSp mod">
-        <pc:chgData name="Yujan Basnet" userId="495fd8277ebfbaef" providerId="LiveId" clId="{992D80D9-0300-4A30-8838-15E503452DEA}" dt="2025-06-06T01:49:22.459" v="0" actId="207"/>
+        <pc:chgData name="Yujan Basnet" userId="495fd8277ebfbaef" providerId="LiveId" clId="{992D80D9-0300-4A30-8838-15E503452DEA}" dt="2025-06-18T04:27:26.902" v="7" actId="207"/>
         <pc:sldMkLst>
           <pc:docMk/>
           <pc:sldMk cId="0" sldId="258"/>
         </pc:sldMkLst>
         <pc:spChg chg="mod">
-          <ac:chgData name="Yujan Basnet" userId="495fd8277ebfbaef" providerId="LiveId" clId="{992D80D9-0300-4A30-8838-15E503452DEA}" dt="2025-06-06T01:49:22.459" v="0" actId="207"/>
+          <ac:chgData name="Yujan Basnet" userId="495fd8277ebfbaef" providerId="LiveId" clId="{992D80D9-0300-4A30-8838-15E503452DEA}" dt="2025-06-18T04:27:26.902" v="7" actId="207"/>
           <ac:spMkLst>
             <pc:docMk/>
             <pc:sldMk cId="0" sldId="258"/>
+            <ac:spMk id="3" creationId="{00000000-0000-0000-0000-000000000000}"/>
+          </ac:spMkLst>
+        </pc:spChg>
+      </pc:sldChg>
+      <pc:sldChg chg="modSp mod">
+        <pc:chgData name="Yujan Basnet" userId="495fd8277ebfbaef" providerId="LiveId" clId="{992D80D9-0300-4A30-8838-15E503452DEA}" dt="2025-06-18T09:47:46.480" v="8" actId="207"/>
+        <pc:sldMkLst>
+          <pc:docMk/>
+          <pc:sldMk cId="0" sldId="273"/>
+        </pc:sldMkLst>
+        <pc:spChg chg="mod">
+          <ac:chgData name="Yujan Basnet" userId="495fd8277ebfbaef" providerId="LiveId" clId="{992D80D9-0300-4A30-8838-15E503452DEA}" dt="2025-06-18T09:47:46.480" v="8" actId="207"/>
+          <ac:spMkLst>
+            <pc:docMk/>
+            <pc:sldMk cId="0" sldId="273"/>
+            <ac:spMk id="3" creationId="{00000000-0000-0000-0000-000000000000}"/>
+          </ac:spMkLst>
+        </pc:spChg>
+      </pc:sldChg>
+      <pc:sldChg chg="modSp mod">
+        <pc:chgData name="Yujan Basnet" userId="495fd8277ebfbaef" providerId="LiveId" clId="{992D80D9-0300-4A30-8838-15E503452DEA}" dt="2025-06-18T10:11:18.863" v="10" actId="21"/>
+        <pc:sldMkLst>
+          <pc:docMk/>
+          <pc:sldMk cId="0" sldId="291"/>
+        </pc:sldMkLst>
+        <pc:spChg chg="mod">
+          <ac:chgData name="Yujan Basnet" userId="495fd8277ebfbaef" providerId="LiveId" clId="{992D80D9-0300-4A30-8838-15E503452DEA}" dt="2025-06-18T10:11:18.863" v="10" actId="21"/>
+          <ac:spMkLst>
+            <pc:docMk/>
+            <pc:sldMk cId="0" sldId="291"/>
+            <ac:spMk id="3" creationId="{00000000-0000-0000-0000-000000000000}"/>
+          </ac:spMkLst>
+        </pc:spChg>
+      </pc:sldChg>
+      <pc:sldChg chg="modSp mod">
+        <pc:chgData name="Yujan Basnet" userId="495fd8277ebfbaef" providerId="LiveId" clId="{992D80D9-0300-4A30-8838-15E503452DEA}" dt="2025-06-18T10:44:13.427" v="14" actId="21"/>
+        <pc:sldMkLst>
+          <pc:docMk/>
+          <pc:sldMk cId="0" sldId="296"/>
+        </pc:sldMkLst>
+        <pc:spChg chg="mod">
+          <ac:chgData name="Yujan Basnet" userId="495fd8277ebfbaef" providerId="LiveId" clId="{992D80D9-0300-4A30-8838-15E503452DEA}" dt="2025-06-18T10:44:13.427" v="14" actId="21"/>
+          <ac:spMkLst>
+            <pc:docMk/>
+            <pc:sldMk cId="0" sldId="296"/>
+            <ac:spMk id="3" creationId="{00000000-0000-0000-0000-000000000000}"/>
+          </ac:spMkLst>
+        </pc:spChg>
+      </pc:sldChg>
+      <pc:sldChg chg="modSp mod">
+        <pc:chgData name="Yujan Basnet" userId="495fd8277ebfbaef" providerId="LiveId" clId="{992D80D9-0300-4A30-8838-15E503452DEA}" dt="2025-06-18T10:50:01.728" v="15" actId="207"/>
+        <pc:sldMkLst>
+          <pc:docMk/>
+          <pc:sldMk cId="0" sldId="299"/>
+        </pc:sldMkLst>
+        <pc:spChg chg="mod">
+          <ac:chgData name="Yujan Basnet" userId="495fd8277ebfbaef" providerId="LiveId" clId="{992D80D9-0300-4A30-8838-15E503452DEA}" dt="2025-06-18T10:50:01.728" v="15" actId="207"/>
+          <ac:spMkLst>
+            <pc:docMk/>
+            <pc:sldMk cId="0" sldId="299"/>
             <ac:spMk id="3" creationId="{00000000-0000-0000-0000-000000000000}"/>
           </ac:spMkLst>
         </pc:spChg>
@@ -363,7 +423,7 @@
           <a:p>
             <a:fld id="{D34AE44F-3886-4BC9-84EC-9E23167748CE}" type="datetimeFigureOut">
               <a:rPr lang="en-IN" smtClean="0"/>
-              <a:t>06-06-2025</a:t>
+              <a:t>18-06-2025</a:t>
             </a:fld>
             <a:endParaRPr lang="en-IN"/>
           </a:p>
@@ -9454,7 +9514,7 @@
               </a:rPr>
               <a:t> deadlines:</a:t>
             </a:r>
-            <a:endParaRPr sz="3200">
+            <a:endParaRPr sz="3200" dirty="0">
               <a:latin typeface="Calibri"/>
               <a:cs typeface="Calibri"/>
             </a:endParaRPr>
@@ -9475,6 +9535,9 @@
             </a:pPr>
             <a:r>
               <a:rPr sz="2800" spc="-5" dirty="0">
+                <a:solidFill>
+                  <a:srgbClr val="00B050"/>
+                </a:solidFill>
                 <a:latin typeface="Calibri"/>
                 <a:cs typeface="Calibri"/>
               </a:rPr>
@@ -9482,6 +9545,9 @@
             </a:r>
             <a:r>
               <a:rPr sz="2800" spc="10" dirty="0">
+                <a:solidFill>
+                  <a:srgbClr val="00B050"/>
+                </a:solidFill>
                 <a:latin typeface="Calibri"/>
                 <a:cs typeface="Calibri"/>
               </a:rPr>
@@ -9489,6 +9555,9 @@
             </a:r>
             <a:r>
               <a:rPr sz="2800" spc="-10" dirty="0">
+                <a:solidFill>
+                  <a:srgbClr val="00B050"/>
+                </a:solidFill>
                 <a:latin typeface="Calibri"/>
                 <a:cs typeface="Calibri"/>
               </a:rPr>
@@ -9496,6 +9565,9 @@
             </a:r>
             <a:r>
               <a:rPr sz="2800" spc="20" dirty="0">
+                <a:solidFill>
+                  <a:srgbClr val="00B050"/>
+                </a:solidFill>
                 <a:latin typeface="Calibri"/>
                 <a:cs typeface="Calibri"/>
               </a:rPr>
@@ -9503,6 +9575,9 @@
             </a:r>
             <a:r>
               <a:rPr sz="2800" spc="-5" dirty="0">
+                <a:solidFill>
+                  <a:srgbClr val="00B050"/>
+                </a:solidFill>
                 <a:latin typeface="Calibri"/>
                 <a:cs typeface="Calibri"/>
               </a:rPr>
@@ -9510,6 +9585,9 @@
             </a:r>
             <a:r>
               <a:rPr sz="2800" spc="10" dirty="0">
+                <a:solidFill>
+                  <a:srgbClr val="00B050"/>
+                </a:solidFill>
                 <a:latin typeface="Calibri"/>
                 <a:cs typeface="Calibri"/>
               </a:rPr>
@@ -9517,6 +9595,9 @@
             </a:r>
             <a:r>
               <a:rPr sz="2800" spc="-10" dirty="0">
+                <a:solidFill>
+                  <a:srgbClr val="00B050"/>
+                </a:solidFill>
                 <a:latin typeface="Calibri"/>
                 <a:cs typeface="Calibri"/>
               </a:rPr>
@@ -9524,6 +9605,9 @@
             </a:r>
             <a:r>
               <a:rPr sz="2800" spc="10" dirty="0">
+                <a:solidFill>
+                  <a:srgbClr val="00B050"/>
+                </a:solidFill>
                 <a:latin typeface="Calibri"/>
                 <a:cs typeface="Calibri"/>
               </a:rPr>
@@ -9531,6 +9615,9 @@
             </a:r>
             <a:r>
               <a:rPr sz="2800" spc="-5" dirty="0">
+                <a:solidFill>
+                  <a:srgbClr val="00B050"/>
+                </a:solidFill>
                 <a:latin typeface="Calibri"/>
                 <a:cs typeface="Calibri"/>
               </a:rPr>
@@ -9538,6 +9625,9 @@
             </a:r>
             <a:r>
               <a:rPr sz="2800" spc="20" dirty="0">
+                <a:solidFill>
+                  <a:srgbClr val="00B050"/>
+                </a:solidFill>
                 <a:latin typeface="Calibri"/>
                 <a:cs typeface="Calibri"/>
               </a:rPr>
@@ -9545,12 +9635,18 @@
             </a:r>
             <a:r>
               <a:rPr sz="2800" spc="-10" dirty="0">
+                <a:solidFill>
+                  <a:srgbClr val="00B050"/>
+                </a:solidFill>
                 <a:latin typeface="Calibri"/>
                 <a:cs typeface="Calibri"/>
               </a:rPr>
               <a:t>priority;</a:t>
             </a:r>
-            <a:endParaRPr sz="2800">
+            <a:endParaRPr sz="2800" dirty="0">
+              <a:solidFill>
+                <a:srgbClr val="00B050"/>
+              </a:solidFill>
               <a:latin typeface="Calibri"/>
               <a:cs typeface="Calibri"/>
             </a:endParaRPr>
@@ -9571,6 +9667,9 @@
             </a:pPr>
             <a:r>
               <a:rPr sz="2800" spc="-5" dirty="0">
+                <a:solidFill>
+                  <a:srgbClr val="00B050"/>
+                </a:solidFill>
                 <a:latin typeface="Calibri"/>
                 <a:cs typeface="Calibri"/>
               </a:rPr>
@@ -9578,6 +9677,9 @@
             </a:r>
             <a:r>
               <a:rPr sz="2800" spc="-10" dirty="0">
+                <a:solidFill>
+                  <a:srgbClr val="00B050"/>
+                </a:solidFill>
                 <a:latin typeface="Calibri"/>
                 <a:cs typeface="Calibri"/>
               </a:rPr>
@@ -9585,6 +9687,9 @@
             </a:r>
             <a:r>
               <a:rPr sz="2800" spc="-15" dirty="0">
+                <a:solidFill>
+                  <a:srgbClr val="00B050"/>
+                </a:solidFill>
                 <a:latin typeface="Calibri"/>
                 <a:cs typeface="Calibri"/>
               </a:rPr>
@@ -9592,6 +9697,9 @@
             </a:r>
             <a:r>
               <a:rPr sz="2800" spc="-10" dirty="0">
+                <a:solidFill>
+                  <a:srgbClr val="00B050"/>
+                </a:solidFill>
                 <a:latin typeface="Calibri"/>
                 <a:cs typeface="Calibri"/>
               </a:rPr>
@@ -9599,6 +9707,9 @@
             </a:r>
             <a:r>
               <a:rPr sz="2800" spc="-5" dirty="0">
+                <a:solidFill>
+                  <a:srgbClr val="00B050"/>
+                </a:solidFill>
                 <a:latin typeface="Calibri"/>
                 <a:cs typeface="Calibri"/>
               </a:rPr>
@@ -9606,6 +9717,9 @@
             </a:r>
             <a:r>
               <a:rPr sz="2800" spc="5" dirty="0">
+                <a:solidFill>
+                  <a:srgbClr val="00B050"/>
+                </a:solidFill>
                 <a:latin typeface="Calibri"/>
                 <a:cs typeface="Calibri"/>
               </a:rPr>
@@ -9613,6 +9727,9 @@
             </a:r>
             <a:r>
               <a:rPr sz="2800" spc="-10" dirty="0">
+                <a:solidFill>
+                  <a:srgbClr val="00B050"/>
+                </a:solidFill>
                 <a:latin typeface="Calibri"/>
                 <a:cs typeface="Calibri"/>
               </a:rPr>
@@ -9620,6 +9737,9 @@
             </a:r>
             <a:r>
               <a:rPr sz="2800" spc="25" dirty="0">
+                <a:solidFill>
+                  <a:srgbClr val="00B050"/>
+                </a:solidFill>
                 <a:latin typeface="Calibri"/>
                 <a:cs typeface="Calibri"/>
               </a:rPr>
@@ -9627,6 +9747,9 @@
             </a:r>
             <a:r>
               <a:rPr sz="2800" spc="-5" dirty="0">
+                <a:solidFill>
+                  <a:srgbClr val="00B050"/>
+                </a:solidFill>
                 <a:latin typeface="Calibri"/>
                 <a:cs typeface="Calibri"/>
               </a:rPr>
@@ -9634,6 +9757,9 @@
             </a:r>
             <a:r>
               <a:rPr sz="2800" spc="5" dirty="0">
+                <a:solidFill>
+                  <a:srgbClr val="00B050"/>
+                </a:solidFill>
                 <a:latin typeface="Calibri"/>
                 <a:cs typeface="Calibri"/>
               </a:rPr>
@@ -9641,6 +9767,9 @@
             </a:r>
             <a:r>
               <a:rPr sz="2800" spc="-10" dirty="0">
+                <a:solidFill>
+                  <a:srgbClr val="00B050"/>
+                </a:solidFill>
                 <a:latin typeface="Calibri"/>
                 <a:cs typeface="Calibri"/>
               </a:rPr>
@@ -9648,6 +9777,9 @@
             </a:r>
             <a:r>
               <a:rPr sz="2800" spc="-5" dirty="0">
+                <a:solidFill>
+                  <a:srgbClr val="00B050"/>
+                </a:solidFill>
                 <a:latin typeface="Calibri"/>
                 <a:cs typeface="Calibri"/>
               </a:rPr>
@@ -9655,6 +9787,9 @@
             </a:r>
             <a:r>
               <a:rPr sz="2800" spc="5" dirty="0">
+                <a:solidFill>
+                  <a:srgbClr val="00B050"/>
+                </a:solidFill>
                 <a:latin typeface="Calibri"/>
                 <a:cs typeface="Calibri"/>
               </a:rPr>
@@ -9662,12 +9797,18 @@
             </a:r>
             <a:r>
               <a:rPr sz="2800" spc="-10" dirty="0">
+                <a:solidFill>
+                  <a:srgbClr val="00B050"/>
+                </a:solidFill>
                 <a:latin typeface="Calibri"/>
                 <a:cs typeface="Calibri"/>
               </a:rPr>
               <a:t>priority</a:t>
             </a:r>
-            <a:endParaRPr sz="2800">
+            <a:endParaRPr sz="2800" dirty="0">
+              <a:solidFill>
+                <a:srgbClr val="00B050"/>
+              </a:solidFill>
               <a:latin typeface="Calibri"/>
               <a:cs typeface="Calibri"/>
             </a:endParaRPr>
@@ -12171,7 +12312,7 @@
               </a:rPr>
               <a:t>processes</a:t>
             </a:r>
-            <a:endParaRPr sz="3200">
+            <a:endParaRPr sz="3200" dirty="0">
               <a:latin typeface="Calibri"/>
               <a:cs typeface="Calibri"/>
             </a:endParaRPr>
@@ -12307,7 +12448,7 @@
               </a:rPr>
               <a:t>every</a:t>
             </a:r>
-            <a:endParaRPr sz="2800">
+            <a:endParaRPr sz="2800" dirty="0">
               <a:latin typeface="Calibri"/>
               <a:cs typeface="Calibri"/>
             </a:endParaRPr>
@@ -12346,7 +12487,7 @@
               </a:rPr>
               <a:t>msec.</a:t>
             </a:r>
-            <a:endParaRPr sz="2800">
+            <a:endParaRPr sz="2800" dirty="0">
               <a:latin typeface="Calibri"/>
               <a:cs typeface="Calibri"/>
             </a:endParaRPr>
@@ -12456,7 +12597,7 @@
               </a:rPr>
               <a:t>clockwork!</a:t>
             </a:r>
-            <a:endParaRPr sz="2800">
+            <a:endParaRPr sz="2800" dirty="0">
               <a:latin typeface="Calibri"/>
               <a:cs typeface="Calibri"/>
             </a:endParaRPr>
@@ -12600,76 +12741,76 @@
               </a:tabLst>
             </a:pPr>
             <a:r>
-              <a:rPr sz="2400" spc="-10" dirty="0">
+              <a:rPr lang="en-US" sz="2400" spc="-10" dirty="0">
                 <a:latin typeface="Calibri"/>
                 <a:cs typeface="Calibri"/>
               </a:rPr>
               <a:t>Periodic process </a:t>
             </a:r>
             <a:r>
-              <a:rPr sz="2400" i="1" dirty="0">
+              <a:rPr lang="en-US" sz="2400" i="1" dirty="0">
                 <a:latin typeface="Calibri"/>
                 <a:cs typeface="Calibri"/>
               </a:rPr>
               <a:t>i </a:t>
             </a:r>
             <a:r>
-              <a:rPr sz="2400" spc="-10" dirty="0">
+              <a:rPr lang="en-US" sz="2400" spc="-10" dirty="0">
                 <a:latin typeface="Calibri"/>
                 <a:cs typeface="Calibri"/>
               </a:rPr>
               <a:t>requires </a:t>
             </a:r>
             <a:r>
-              <a:rPr sz="2400" dirty="0">
+              <a:rPr lang="en-US" sz="2400" dirty="0">
                 <a:latin typeface="Calibri"/>
                 <a:cs typeface="Calibri"/>
               </a:rPr>
               <a:t>the </a:t>
             </a:r>
             <a:r>
-              <a:rPr sz="2400" spc="-5" dirty="0">
+              <a:rPr lang="en-US" sz="2400" spc="-5" dirty="0">
                 <a:latin typeface="Calibri"/>
                 <a:cs typeface="Calibri"/>
               </a:rPr>
               <a:t>CPU </a:t>
             </a:r>
             <a:r>
-              <a:rPr sz="2400" spc="-15" dirty="0">
+              <a:rPr lang="en-US" sz="2400" spc="-15" dirty="0">
                 <a:latin typeface="Calibri"/>
                 <a:cs typeface="Calibri"/>
               </a:rPr>
               <a:t>at </a:t>
             </a:r>
             <a:r>
-              <a:rPr sz="2400" spc="-5" dirty="0">
+              <a:rPr lang="en-US" sz="2400" spc="-5" dirty="0">
                 <a:latin typeface="Calibri"/>
                 <a:cs typeface="Calibri"/>
               </a:rPr>
               <a:t>specified </a:t>
             </a:r>
             <a:r>
-              <a:rPr sz="2400" spc="-10" dirty="0">
+              <a:rPr lang="en-US" sz="2400" spc="-10" dirty="0">
                 <a:latin typeface="Calibri"/>
                 <a:cs typeface="Calibri"/>
               </a:rPr>
               <a:t>intervals </a:t>
             </a:r>
             <a:r>
-              <a:rPr sz="2400" spc="-530" dirty="0">
-                <a:latin typeface="Calibri"/>
-                <a:cs typeface="Calibri"/>
-              </a:rPr>
-              <a:t> </a:t>
-            </a:r>
-            <a:r>
-              <a:rPr sz="2400" spc="-5" dirty="0">
+              <a:rPr lang="en-US" sz="2400" spc="-530" dirty="0">
+                <a:latin typeface="Calibri"/>
+                <a:cs typeface="Calibri"/>
+              </a:rPr>
+              <a:t> </a:t>
+            </a:r>
+            <a:r>
+              <a:rPr lang="en-US" sz="2400" spc="-5" dirty="0">
                 <a:latin typeface="Calibri"/>
                 <a:cs typeface="Calibri"/>
               </a:rPr>
               <a:t>(periods)</a:t>
             </a:r>
-            <a:endParaRPr sz="2400" dirty="0">
+            <a:endParaRPr lang="en-US" sz="2400" dirty="0">
               <a:latin typeface="Calibri"/>
               <a:cs typeface="Calibri"/>
             </a:endParaRPr>
@@ -12690,90 +12831,90 @@
               </a:tabLst>
             </a:pPr>
             <a:r>
-              <a:rPr sz="2400" b="1" i="1" dirty="0">
+              <a:rPr lang="en-US" sz="2400" b="1" i="1" dirty="0">
                 <a:latin typeface="Calibri"/>
                 <a:cs typeface="Calibri"/>
               </a:rPr>
               <a:t>p</a:t>
             </a:r>
             <a:r>
-              <a:rPr sz="2400" b="1" i="1" baseline="-20833" dirty="0">
+              <a:rPr lang="en-US" sz="2400" b="1" i="1" baseline="-20833" dirty="0">
                 <a:latin typeface="Calibri"/>
                 <a:cs typeface="Calibri"/>
               </a:rPr>
               <a:t>i</a:t>
             </a:r>
             <a:r>
-              <a:rPr sz="2400" b="1" i="1" spc="209" baseline="-20833" dirty="0">
-                <a:latin typeface="Calibri"/>
-                <a:cs typeface="Calibri"/>
-              </a:rPr>
-              <a:t> </a:t>
-            </a:r>
-            <a:r>
-              <a:rPr sz="2400" dirty="0">
+              <a:rPr lang="en-US" sz="2400" b="1" i="1" spc="209" baseline="-20833" dirty="0">
+                <a:latin typeface="Calibri"/>
+                <a:cs typeface="Calibri"/>
+              </a:rPr>
+              <a:t> </a:t>
+            </a:r>
+            <a:r>
+              <a:rPr lang="en-US" sz="2400" dirty="0">
                 <a:latin typeface="Calibri"/>
                 <a:cs typeface="Calibri"/>
               </a:rPr>
               <a:t>is</a:t>
             </a:r>
             <a:r>
-              <a:rPr sz="2400" spc="-5" dirty="0">
-                <a:latin typeface="Calibri"/>
-                <a:cs typeface="Calibri"/>
-              </a:rPr>
-              <a:t> </a:t>
-            </a:r>
-            <a:r>
-              <a:rPr sz="2400" dirty="0">
+              <a:rPr lang="en-US" sz="2400" spc="-5" dirty="0">
+                <a:latin typeface="Calibri"/>
+                <a:cs typeface="Calibri"/>
+              </a:rPr>
+              <a:t> </a:t>
+            </a:r>
+            <a:r>
+              <a:rPr lang="en-US" sz="2400" dirty="0">
                 <a:latin typeface="Calibri"/>
                 <a:cs typeface="Calibri"/>
               </a:rPr>
               <a:t>the</a:t>
             </a:r>
             <a:r>
-              <a:rPr sz="2400" spc="-5" dirty="0">
-                <a:latin typeface="Calibri"/>
-                <a:cs typeface="Calibri"/>
-              </a:rPr>
-              <a:t> </a:t>
-            </a:r>
-            <a:r>
-              <a:rPr sz="2400" spc="-15" dirty="0">
+              <a:rPr lang="en-US" sz="2400" spc="-5" dirty="0">
+                <a:latin typeface="Calibri"/>
+                <a:cs typeface="Calibri"/>
+              </a:rPr>
+              <a:t> </a:t>
+            </a:r>
+            <a:r>
+              <a:rPr lang="en-US" sz="2400" spc="-15" dirty="0">
                 <a:latin typeface="Calibri"/>
                 <a:cs typeface="Calibri"/>
               </a:rPr>
               <a:t>duration</a:t>
             </a:r>
             <a:r>
-              <a:rPr sz="2400" spc="-5" dirty="0">
-                <a:latin typeface="Calibri"/>
-                <a:cs typeface="Calibri"/>
-              </a:rPr>
-              <a:t> </a:t>
-            </a:r>
-            <a:r>
-              <a:rPr sz="2400" spc="-10" dirty="0">
+              <a:rPr lang="en-US" sz="2400" spc="-5" dirty="0">
+                <a:latin typeface="Calibri"/>
+                <a:cs typeface="Calibri"/>
+              </a:rPr>
+              <a:t> </a:t>
+            </a:r>
+            <a:r>
+              <a:rPr lang="en-US" sz="2400" spc="-10" dirty="0">
                 <a:latin typeface="Calibri"/>
                 <a:cs typeface="Calibri"/>
               </a:rPr>
               <a:t>of </a:t>
             </a:r>
             <a:r>
-              <a:rPr sz="2400" dirty="0">
+              <a:rPr lang="en-US" sz="2400" dirty="0">
                 <a:latin typeface="Calibri"/>
                 <a:cs typeface="Calibri"/>
               </a:rPr>
               <a:t>the</a:t>
             </a:r>
             <a:r>
-              <a:rPr sz="2400" spc="-5" dirty="0">
+              <a:rPr lang="en-US" sz="2400" spc="-5" dirty="0">
                 <a:latin typeface="Calibri"/>
                 <a:cs typeface="Calibri"/>
               </a:rPr>
               <a:t> period</a:t>
             </a:r>
-            <a:endParaRPr sz="2400" dirty="0">
+            <a:endParaRPr lang="en-US" sz="2400" dirty="0">
               <a:latin typeface="Calibri"/>
               <a:cs typeface="Calibri"/>
             </a:endParaRPr>
@@ -12794,70 +12935,70 @@
               </a:tabLst>
             </a:pPr>
             <a:r>
-              <a:rPr sz="2400" b="1" i="1" spc="-5" dirty="0">
+              <a:rPr lang="en-US" sz="2400" b="1" i="1" spc="-5" dirty="0" err="1">
                 <a:latin typeface="Calibri"/>
                 <a:cs typeface="Calibri"/>
               </a:rPr>
               <a:t>t</a:t>
             </a:r>
             <a:r>
-              <a:rPr sz="2400" b="1" i="1" spc="-7" baseline="-20833" dirty="0">
+              <a:rPr lang="en-US" sz="2400" b="1" i="1" spc="-7" baseline="-20833" dirty="0" err="1">
                 <a:latin typeface="Calibri"/>
                 <a:cs typeface="Calibri"/>
               </a:rPr>
               <a:t>i</a:t>
             </a:r>
             <a:r>
-              <a:rPr sz="2400" b="1" i="1" spc="232" baseline="-20833" dirty="0">
-                <a:latin typeface="Calibri"/>
-                <a:cs typeface="Calibri"/>
-              </a:rPr>
-              <a:t> </a:t>
-            </a:r>
-            <a:r>
-              <a:rPr sz="2400" dirty="0">
+              <a:rPr lang="en-US" sz="2400" b="1" i="1" spc="232" baseline="-20833" dirty="0">
+                <a:latin typeface="Calibri"/>
+                <a:cs typeface="Calibri"/>
+              </a:rPr>
+              <a:t> </a:t>
+            </a:r>
+            <a:r>
+              <a:rPr lang="en-US" sz="2400" dirty="0">
                 <a:latin typeface="Calibri"/>
                 <a:cs typeface="Calibri"/>
               </a:rPr>
               <a:t>is</a:t>
             </a:r>
             <a:r>
-              <a:rPr sz="2400" spc="-15" dirty="0">
-                <a:latin typeface="Calibri"/>
-                <a:cs typeface="Calibri"/>
-              </a:rPr>
-              <a:t> </a:t>
-            </a:r>
-            <a:r>
-              <a:rPr sz="2400" dirty="0">
+              <a:rPr lang="en-US" sz="2400" spc="-15" dirty="0">
+                <a:latin typeface="Calibri"/>
+                <a:cs typeface="Calibri"/>
+              </a:rPr>
+              <a:t> </a:t>
+            </a:r>
+            <a:r>
+              <a:rPr lang="en-US" sz="2400" dirty="0">
                 <a:latin typeface="Calibri"/>
                 <a:cs typeface="Calibri"/>
               </a:rPr>
               <a:t>the</a:t>
             </a:r>
             <a:r>
-              <a:rPr sz="2400" spc="-25" dirty="0">
-                <a:latin typeface="Calibri"/>
-                <a:cs typeface="Calibri"/>
-              </a:rPr>
-              <a:t> </a:t>
-            </a:r>
-            <a:r>
-              <a:rPr sz="2400" spc="-10" dirty="0">
+              <a:rPr lang="en-US" sz="2400" spc="-25" dirty="0">
+                <a:latin typeface="Calibri"/>
+                <a:cs typeface="Calibri"/>
+              </a:rPr>
+              <a:t> </a:t>
+            </a:r>
+            <a:r>
+              <a:rPr lang="en-US" sz="2400" spc="-10" dirty="0">
                 <a:latin typeface="Calibri"/>
                 <a:cs typeface="Calibri"/>
               </a:rPr>
               <a:t>processing</a:t>
             </a:r>
             <a:r>
-              <a:rPr sz="2400" spc="-20" dirty="0">
-                <a:latin typeface="Calibri"/>
-                <a:cs typeface="Calibri"/>
-              </a:rPr>
-              <a:t> </a:t>
-            </a:r>
-            <a:r>
-              <a:rPr sz="2400" dirty="0">
+              <a:rPr lang="en-US" sz="2400" spc="-20" dirty="0">
+                <a:latin typeface="Calibri"/>
+                <a:cs typeface="Calibri"/>
+              </a:rPr>
+              <a:t> </a:t>
+            </a:r>
+            <a:r>
+              <a:rPr lang="en-US" sz="2400" dirty="0">
                 <a:latin typeface="Calibri"/>
                 <a:cs typeface="Calibri"/>
               </a:rPr>
@@ -12880,147 +13021,147 @@
               </a:tabLst>
             </a:pPr>
             <a:r>
-              <a:rPr sz="2400" b="1" i="1" dirty="0">
+              <a:rPr lang="en-US" sz="2400" b="1" i="1" dirty="0">
                 <a:latin typeface="Calibri"/>
                 <a:cs typeface="Calibri"/>
               </a:rPr>
               <a:t>d</a:t>
             </a:r>
             <a:r>
-              <a:rPr sz="2400" b="1" i="1" baseline="-20833" dirty="0">
+              <a:rPr lang="en-US" sz="2400" b="1" i="1" baseline="-20833" dirty="0">
                 <a:latin typeface="Calibri"/>
                 <a:cs typeface="Calibri"/>
               </a:rPr>
               <a:t>i</a:t>
             </a:r>
             <a:r>
-              <a:rPr sz="2400" b="1" i="1" spc="209" baseline="-20833" dirty="0">
-                <a:latin typeface="Calibri"/>
-                <a:cs typeface="Calibri"/>
-              </a:rPr>
-              <a:t> </a:t>
-            </a:r>
-            <a:r>
-              <a:rPr sz="2400" dirty="0">
+              <a:rPr lang="en-US" sz="2400" b="1" i="1" spc="209" baseline="-20833" dirty="0">
+                <a:latin typeface="Calibri"/>
+                <a:cs typeface="Calibri"/>
+              </a:rPr>
+              <a:t> </a:t>
+            </a:r>
+            <a:r>
+              <a:rPr lang="en-US" sz="2400" dirty="0">
                 <a:latin typeface="Calibri"/>
                 <a:cs typeface="Calibri"/>
               </a:rPr>
               <a:t>is</a:t>
             </a:r>
             <a:r>
-              <a:rPr sz="2400" spc="-5" dirty="0">
-                <a:latin typeface="Calibri"/>
-                <a:cs typeface="Calibri"/>
-              </a:rPr>
-              <a:t> </a:t>
-            </a:r>
-            <a:r>
-              <a:rPr sz="2400" dirty="0">
+              <a:rPr lang="en-US" sz="2400" spc="-5" dirty="0">
+                <a:latin typeface="Calibri"/>
+                <a:cs typeface="Calibri"/>
+              </a:rPr>
+              <a:t> </a:t>
+            </a:r>
+            <a:r>
+              <a:rPr lang="en-US" sz="2400" dirty="0">
                 <a:latin typeface="Calibri"/>
                 <a:cs typeface="Calibri"/>
               </a:rPr>
               <a:t>the</a:t>
             </a:r>
             <a:r>
-              <a:rPr sz="2400" spc="-5" dirty="0">
+              <a:rPr lang="en-US" sz="2400" spc="-5" dirty="0">
                 <a:latin typeface="Calibri"/>
                 <a:cs typeface="Calibri"/>
               </a:rPr>
               <a:t> deadline</a:t>
             </a:r>
             <a:r>
-              <a:rPr sz="2400" dirty="0">
-                <a:latin typeface="Calibri"/>
-                <a:cs typeface="Calibri"/>
-              </a:rPr>
-              <a:t> </a:t>
-            </a:r>
-            <a:r>
-              <a:rPr sz="2400" spc="-10" dirty="0">
+              <a:rPr lang="en-US" sz="2400" dirty="0">
+                <a:latin typeface="Calibri"/>
+                <a:cs typeface="Calibri"/>
+              </a:rPr>
+              <a:t> </a:t>
+            </a:r>
+            <a:r>
+              <a:rPr lang="en-US" sz="2400" spc="-10" dirty="0">
                 <a:latin typeface="Calibri"/>
                 <a:cs typeface="Calibri"/>
               </a:rPr>
               <a:t>by</a:t>
             </a:r>
             <a:r>
-              <a:rPr sz="2400" spc="-15" dirty="0">
-                <a:latin typeface="Calibri"/>
-                <a:cs typeface="Calibri"/>
-              </a:rPr>
-              <a:t> </a:t>
-            </a:r>
-            <a:r>
-              <a:rPr sz="2400" dirty="0">
+              <a:rPr lang="en-US" sz="2400" spc="-15" dirty="0">
+                <a:latin typeface="Calibri"/>
+                <a:cs typeface="Calibri"/>
+              </a:rPr>
+              <a:t> </a:t>
+            </a:r>
+            <a:r>
+              <a:rPr lang="en-US" sz="2400" dirty="0">
                 <a:latin typeface="Calibri"/>
                 <a:cs typeface="Calibri"/>
               </a:rPr>
               <a:t>when</a:t>
             </a:r>
             <a:r>
-              <a:rPr sz="2400" spc="-5" dirty="0">
-                <a:latin typeface="Calibri"/>
-                <a:cs typeface="Calibri"/>
-              </a:rPr>
-              <a:t> </a:t>
-            </a:r>
-            <a:r>
-              <a:rPr sz="2400" dirty="0">
+              <a:rPr lang="en-US" sz="2400" spc="-5" dirty="0">
+                <a:latin typeface="Calibri"/>
+                <a:cs typeface="Calibri"/>
+              </a:rPr>
+              <a:t> </a:t>
+            </a:r>
+            <a:r>
+              <a:rPr lang="en-US" sz="2400" dirty="0">
                 <a:latin typeface="Calibri"/>
                 <a:cs typeface="Calibri"/>
               </a:rPr>
               <a:t>the</a:t>
             </a:r>
             <a:r>
-              <a:rPr sz="2400" spc="-5" dirty="0">
-                <a:latin typeface="Calibri"/>
-                <a:cs typeface="Calibri"/>
-              </a:rPr>
-              <a:t> </a:t>
-            </a:r>
-            <a:r>
-              <a:rPr sz="2400" spc="-10" dirty="0">
+              <a:rPr lang="en-US" sz="2400" spc="-5" dirty="0">
+                <a:latin typeface="Calibri"/>
+                <a:cs typeface="Calibri"/>
+              </a:rPr>
+              <a:t> </a:t>
+            </a:r>
+            <a:r>
+              <a:rPr lang="en-US" sz="2400" spc="-10" dirty="0">
                 <a:latin typeface="Calibri"/>
                 <a:cs typeface="Calibri"/>
               </a:rPr>
               <a:t>process</a:t>
             </a:r>
             <a:r>
-              <a:rPr sz="2400" spc="-25" dirty="0">
-                <a:latin typeface="Calibri"/>
-                <a:cs typeface="Calibri"/>
-              </a:rPr>
-              <a:t> </a:t>
-            </a:r>
-            <a:r>
-              <a:rPr sz="2400" spc="-10" dirty="0">
+              <a:rPr lang="en-US" sz="2400" spc="-25" dirty="0">
+                <a:latin typeface="Calibri"/>
+                <a:cs typeface="Calibri"/>
+              </a:rPr>
+              <a:t> </a:t>
+            </a:r>
+            <a:r>
+              <a:rPr lang="en-US" sz="2400" spc="-10" dirty="0">
                 <a:latin typeface="Calibri"/>
                 <a:cs typeface="Calibri"/>
               </a:rPr>
               <a:t>must</a:t>
             </a:r>
             <a:r>
-              <a:rPr sz="2400" spc="-20" dirty="0">
-                <a:latin typeface="Calibri"/>
-                <a:cs typeface="Calibri"/>
-              </a:rPr>
-              <a:t> </a:t>
-            </a:r>
-            <a:r>
-              <a:rPr sz="2400" spc="-5" dirty="0">
+              <a:rPr lang="en-US" sz="2400" spc="-20" dirty="0">
+                <a:latin typeface="Calibri"/>
+                <a:cs typeface="Calibri"/>
+              </a:rPr>
+              <a:t> </a:t>
+            </a:r>
+            <a:r>
+              <a:rPr lang="en-US" sz="2400" spc="-5" dirty="0">
                 <a:latin typeface="Calibri"/>
                 <a:cs typeface="Calibri"/>
               </a:rPr>
               <a:t>be</a:t>
             </a:r>
             <a:r>
-              <a:rPr sz="2400" spc="-10" dirty="0">
-                <a:latin typeface="Calibri"/>
-                <a:cs typeface="Calibri"/>
-              </a:rPr>
-              <a:t> </a:t>
-            </a:r>
-            <a:r>
-              <a:rPr sz="2400" dirty="0">
+              <a:rPr lang="en-US" sz="2400" spc="-10" dirty="0">
+                <a:latin typeface="Calibri"/>
+                <a:cs typeface="Calibri"/>
+              </a:rPr>
+              <a:t> </a:t>
+            </a:r>
+            <a:r>
+              <a:rPr lang="en-US" sz="2400" dirty="0">
                 <a:latin typeface="Calibri"/>
                 <a:cs typeface="Calibri"/>
               </a:rPr>
@@ -13040,69 +13181,69 @@
               </a:tabLst>
             </a:pPr>
             <a:r>
-              <a:rPr sz="2000" dirty="0">
+              <a:rPr lang="en-US" sz="2000" dirty="0">
                 <a:latin typeface="Arial MT"/>
                 <a:cs typeface="Arial MT"/>
               </a:rPr>
               <a:t>–	</a:t>
             </a:r>
             <a:r>
-              <a:rPr sz="2000" spc="-5" dirty="0">
+              <a:rPr lang="en-US" sz="2000" spc="-5" dirty="0">
                 <a:latin typeface="Calibri"/>
                 <a:cs typeface="Calibri"/>
               </a:rPr>
               <a:t>Often</a:t>
             </a:r>
             <a:r>
-              <a:rPr sz="2000" spc="-30" dirty="0">
-                <a:latin typeface="Calibri"/>
-                <a:cs typeface="Calibri"/>
-              </a:rPr>
-              <a:t> </a:t>
-            </a:r>
-            <a:r>
-              <a:rPr sz="2000" spc="-5" dirty="0">
+              <a:rPr lang="en-US" sz="2000" spc="-30" dirty="0">
+                <a:latin typeface="Calibri"/>
+                <a:cs typeface="Calibri"/>
+              </a:rPr>
+              <a:t> </a:t>
+            </a:r>
+            <a:r>
+              <a:rPr lang="en-US" sz="2000" spc="-5" dirty="0">
                 <a:latin typeface="Calibri"/>
                 <a:cs typeface="Calibri"/>
               </a:rPr>
               <a:t>same</a:t>
             </a:r>
             <a:r>
-              <a:rPr sz="2000" dirty="0">
+              <a:rPr lang="en-US" sz="2000" dirty="0">
                 <a:latin typeface="Calibri"/>
                 <a:cs typeface="Calibri"/>
               </a:rPr>
               <a:t> as end</a:t>
             </a:r>
             <a:r>
-              <a:rPr sz="2000" spc="-25" dirty="0">
-                <a:latin typeface="Calibri"/>
-                <a:cs typeface="Calibri"/>
-              </a:rPr>
-              <a:t> </a:t>
-            </a:r>
-            <a:r>
-              <a:rPr sz="2000" spc="-5" dirty="0">
+              <a:rPr lang="en-US" sz="2000" spc="-25" dirty="0">
+                <a:latin typeface="Calibri"/>
+                <a:cs typeface="Calibri"/>
+              </a:rPr>
+              <a:t> </a:t>
+            </a:r>
+            <a:r>
+              <a:rPr lang="en-US" sz="2000" spc="-5" dirty="0">
                 <a:latin typeface="Calibri"/>
                 <a:cs typeface="Calibri"/>
               </a:rPr>
               <a:t>of</a:t>
             </a:r>
             <a:r>
-              <a:rPr sz="2000" spc="-20" dirty="0">
-                <a:latin typeface="Calibri"/>
-                <a:cs typeface="Calibri"/>
-              </a:rPr>
-              <a:t> </a:t>
-            </a:r>
-            <a:r>
-              <a:rPr sz="2000" spc="-5" dirty="0">
+              <a:rPr lang="en-US" sz="2000" spc="-20" dirty="0">
+                <a:latin typeface="Calibri"/>
+                <a:cs typeface="Calibri"/>
+              </a:rPr>
+              <a:t> </a:t>
+            </a:r>
+            <a:r>
+              <a:rPr lang="en-US" sz="2000" spc="-5" dirty="0">
                 <a:latin typeface="Calibri"/>
                 <a:cs typeface="Calibri"/>
               </a:rPr>
               <a:t>period</a:t>
             </a:r>
-            <a:endParaRPr sz="2000" dirty="0">
+            <a:endParaRPr lang="en-US" sz="2000" dirty="0">
               <a:latin typeface="Calibri"/>
               <a:cs typeface="Calibri"/>
             </a:endParaRPr>
@@ -18130,181 +18271,181 @@
               </a:tabLst>
             </a:pPr>
             <a:r>
-              <a:rPr sz="3200" dirty="0">
+              <a:rPr lang="en-US" sz="3200" dirty="0">
                 <a:latin typeface="Calibri"/>
                 <a:cs typeface="Calibri"/>
               </a:rPr>
               <a:t>When</a:t>
             </a:r>
             <a:r>
-              <a:rPr sz="3200" spc="-20" dirty="0">
-                <a:latin typeface="Calibri"/>
-                <a:cs typeface="Calibri"/>
-              </a:rPr>
-              <a:t> </a:t>
-            </a:r>
-            <a:r>
-              <a:rPr sz="3200" dirty="0">
+              <a:rPr lang="en-US" sz="3200" spc="-20" dirty="0">
+                <a:latin typeface="Calibri"/>
+                <a:cs typeface="Calibri"/>
+              </a:rPr>
+              <a:t> </a:t>
+            </a:r>
+            <a:r>
+              <a:rPr lang="en-US" sz="3200" dirty="0">
                 <a:latin typeface="Calibri"/>
                 <a:cs typeface="Calibri"/>
               </a:rPr>
               <a:t>each </a:t>
             </a:r>
             <a:r>
-              <a:rPr sz="3200" spc="-15" dirty="0">
+              <a:rPr lang="en-US" sz="3200" spc="-15" dirty="0">
                 <a:latin typeface="Calibri"/>
                 <a:cs typeface="Calibri"/>
               </a:rPr>
               <a:t>process</a:t>
             </a:r>
             <a:r>
-              <a:rPr sz="3200" spc="-10" dirty="0">
-                <a:latin typeface="Calibri"/>
-                <a:cs typeface="Calibri"/>
-              </a:rPr>
-              <a:t> </a:t>
-            </a:r>
-            <a:r>
-              <a:rPr sz="3200" i="1" dirty="0">
+              <a:rPr lang="en-US" sz="3200" spc="-10" dirty="0">
+                <a:latin typeface="Calibri"/>
+                <a:cs typeface="Calibri"/>
+              </a:rPr>
+              <a:t> </a:t>
+            </a:r>
+            <a:r>
+              <a:rPr lang="en-US" sz="3200" i="1" dirty="0">
                 <a:latin typeface="Calibri"/>
                 <a:cs typeface="Calibri"/>
               </a:rPr>
               <a:t>i </a:t>
             </a:r>
             <a:r>
-              <a:rPr sz="3200" spc="-10" dirty="0">
+              <a:rPr lang="en-US" sz="3200" spc="-10" dirty="0">
                 <a:latin typeface="Calibri"/>
                 <a:cs typeface="Calibri"/>
               </a:rPr>
               <a:t>become</a:t>
             </a:r>
             <a:r>
-              <a:rPr sz="3200" spc="-20" dirty="0">
-                <a:latin typeface="Calibri"/>
-                <a:cs typeface="Calibri"/>
-              </a:rPr>
-              <a:t> </a:t>
-            </a:r>
-            <a:r>
-              <a:rPr sz="3200" spc="-45" dirty="0">
+              <a:rPr lang="en-US" sz="3200" spc="-20" dirty="0">
+                <a:latin typeface="Calibri"/>
+                <a:cs typeface="Calibri"/>
+              </a:rPr>
+              <a:t> </a:t>
+            </a:r>
+            <a:r>
+              <a:rPr lang="en-US" sz="3200" spc="-45" dirty="0">
                 <a:latin typeface="Calibri"/>
                 <a:cs typeface="Calibri"/>
               </a:rPr>
               <a:t>ready,</a:t>
             </a:r>
             <a:r>
-              <a:rPr sz="3200" spc="-10" dirty="0">
-                <a:latin typeface="Calibri"/>
-                <a:cs typeface="Calibri"/>
-              </a:rPr>
-              <a:t> </a:t>
-            </a:r>
-            <a:r>
-              <a:rPr sz="3200" dirty="0">
+              <a:rPr lang="en-US" sz="3200" spc="-10" dirty="0">
+                <a:latin typeface="Calibri"/>
+                <a:cs typeface="Calibri"/>
+              </a:rPr>
+              <a:t> </a:t>
+            </a:r>
+            <a:r>
+              <a:rPr lang="en-US" sz="3200" dirty="0">
                 <a:latin typeface="Calibri"/>
                 <a:cs typeface="Calibri"/>
               </a:rPr>
               <a:t>it </a:t>
             </a:r>
             <a:r>
-              <a:rPr sz="3200" spc="5" dirty="0">
-                <a:latin typeface="Calibri"/>
-                <a:cs typeface="Calibri"/>
-              </a:rPr>
-              <a:t> </a:t>
-            </a:r>
-            <a:r>
-              <a:rPr sz="3200" dirty="0">
+              <a:rPr lang="en-US" sz="3200" spc="5" dirty="0">
+                <a:latin typeface="Calibri"/>
+                <a:cs typeface="Calibri"/>
+              </a:rPr>
+              <a:t> </a:t>
+            </a:r>
+            <a:r>
+              <a:rPr lang="en-US" sz="3200" dirty="0">
                 <a:latin typeface="Calibri"/>
                 <a:cs typeface="Calibri"/>
               </a:rPr>
               <a:t>announces</a:t>
             </a:r>
             <a:r>
-              <a:rPr sz="3200" spc="-5" dirty="0">
+              <a:rPr lang="en-US" sz="3200" spc="-5" dirty="0">
                 <a:latin typeface="Calibri"/>
                 <a:cs typeface="Calibri"/>
               </a:rPr>
               <a:t> deadline</a:t>
             </a:r>
             <a:r>
-              <a:rPr sz="3200" spc="10" dirty="0">
-                <a:latin typeface="Calibri"/>
-                <a:cs typeface="Calibri"/>
-              </a:rPr>
-              <a:t> </a:t>
-            </a:r>
-            <a:r>
-              <a:rPr sz="3200" i="1" dirty="0">
+              <a:rPr lang="en-US" sz="3200" spc="10" dirty="0">
+                <a:latin typeface="Calibri"/>
+                <a:cs typeface="Calibri"/>
+              </a:rPr>
+              <a:t> </a:t>
+            </a:r>
+            <a:r>
+              <a:rPr lang="en-US" sz="3200" i="1" dirty="0">
                 <a:latin typeface="Calibri"/>
                 <a:cs typeface="Calibri"/>
               </a:rPr>
               <a:t>D</a:t>
             </a:r>
             <a:r>
-              <a:rPr sz="3150" i="1" baseline="-21164" dirty="0">
+              <a:rPr lang="en-US" sz="3150" i="1" baseline="-21164" dirty="0">
                 <a:latin typeface="Calibri"/>
                 <a:cs typeface="Calibri"/>
               </a:rPr>
               <a:t>i</a:t>
             </a:r>
             <a:r>
-              <a:rPr sz="3150" i="1" spc="367" baseline="-21164" dirty="0">
-                <a:latin typeface="Calibri"/>
-                <a:cs typeface="Calibri"/>
-              </a:rPr>
-              <a:t> </a:t>
-            </a:r>
-            <a:r>
-              <a:rPr sz="3200" spc="-30" dirty="0">
+              <a:rPr lang="en-US" sz="3150" i="1" spc="367" baseline="-21164" dirty="0">
+                <a:latin typeface="Calibri"/>
+                <a:cs typeface="Calibri"/>
+              </a:rPr>
+              <a:t> </a:t>
+            </a:r>
+            <a:r>
+              <a:rPr lang="en-US" sz="3200" spc="-30" dirty="0">
                 <a:latin typeface="Calibri"/>
                 <a:cs typeface="Calibri"/>
               </a:rPr>
               <a:t>for</a:t>
             </a:r>
             <a:r>
-              <a:rPr sz="3200" spc="-10" dirty="0">
-                <a:latin typeface="Calibri"/>
-                <a:cs typeface="Calibri"/>
-              </a:rPr>
-              <a:t> </a:t>
-            </a:r>
-            <a:r>
-              <a:rPr sz="3200" dirty="0">
+              <a:rPr lang="en-US" sz="3200" spc="-10" dirty="0">
+                <a:latin typeface="Calibri"/>
+                <a:cs typeface="Calibri"/>
+              </a:rPr>
+              <a:t> </a:t>
+            </a:r>
+            <a:r>
+              <a:rPr lang="en-US" sz="3200" dirty="0">
                 <a:latin typeface="Calibri"/>
                 <a:cs typeface="Calibri"/>
               </a:rPr>
               <a:t>its</a:t>
             </a:r>
             <a:r>
-              <a:rPr sz="3200" spc="-10" dirty="0">
+              <a:rPr lang="en-US" sz="3200" spc="-10" dirty="0">
                 <a:latin typeface="Calibri"/>
                 <a:cs typeface="Calibri"/>
               </a:rPr>
               <a:t> next</a:t>
             </a:r>
             <a:r>
-              <a:rPr sz="3200" spc="5" dirty="0">
-                <a:latin typeface="Calibri"/>
-                <a:cs typeface="Calibri"/>
-              </a:rPr>
-              <a:t> </a:t>
-            </a:r>
-            <a:r>
-              <a:rPr sz="3200" i="1" spc="-15" dirty="0">
+              <a:rPr lang="en-US" sz="3200" spc="5" dirty="0">
+                <a:latin typeface="Calibri"/>
+                <a:cs typeface="Calibri"/>
+              </a:rPr>
+              <a:t> </a:t>
+            </a:r>
+            <a:r>
+              <a:rPr lang="en-US" sz="3200" i="1" spc="-15" dirty="0">
                 <a:latin typeface="Calibri"/>
                 <a:cs typeface="Calibri"/>
               </a:rPr>
               <a:t>task</a:t>
             </a:r>
             <a:r>
-              <a:rPr sz="3200" spc="-15" dirty="0">
+              <a:rPr lang="en-US" sz="3200" spc="-15" dirty="0">
                 <a:latin typeface="Calibri"/>
                 <a:cs typeface="Calibri"/>
               </a:rPr>
               <a:t>.</a:t>
             </a:r>
-            <a:endParaRPr sz="3200" dirty="0">
+            <a:endParaRPr lang="en-US" sz="3200" dirty="0">
               <a:latin typeface="Calibri"/>
               <a:cs typeface="Calibri"/>
             </a:endParaRPr>
@@ -18320,7 +18461,7 @@
               <a:buFont typeface="Arial MT"/>
               <a:buChar char="•"/>
             </a:pPr>
-            <a:endParaRPr sz="4400" dirty="0">
+            <a:endParaRPr lang="en-US" sz="4400" dirty="0">
               <a:latin typeface="Calibri"/>
               <a:cs typeface="Calibri"/>
             </a:endParaRPr>
@@ -18338,125 +18479,125 @@
               </a:tabLst>
             </a:pPr>
             <a:r>
-              <a:rPr sz="3200" spc="-5" dirty="0">
+              <a:rPr lang="en-US" sz="3200" spc="-5" dirty="0">
                 <a:latin typeface="Calibri"/>
                 <a:cs typeface="Calibri"/>
               </a:rPr>
               <a:t>Scheduler</a:t>
             </a:r>
             <a:r>
-              <a:rPr sz="3200" spc="-30" dirty="0">
-                <a:latin typeface="Calibri"/>
-                <a:cs typeface="Calibri"/>
-              </a:rPr>
-              <a:t> </a:t>
-            </a:r>
-            <a:r>
-              <a:rPr sz="3200" spc="-20" dirty="0">
+              <a:rPr lang="en-US" sz="3200" spc="-30" dirty="0">
+                <a:latin typeface="Calibri"/>
+                <a:cs typeface="Calibri"/>
+              </a:rPr>
+              <a:t> </a:t>
+            </a:r>
+            <a:r>
+              <a:rPr lang="en-US" sz="3200" spc="-20" dirty="0">
                 <a:latin typeface="Calibri"/>
                 <a:cs typeface="Calibri"/>
               </a:rPr>
               <a:t>always</a:t>
             </a:r>
             <a:r>
-              <a:rPr sz="3200" spc="-5" dirty="0">
-                <a:latin typeface="Calibri"/>
-                <a:cs typeface="Calibri"/>
-              </a:rPr>
-              <a:t> </a:t>
-            </a:r>
-            <a:r>
-              <a:rPr sz="3200" dirty="0">
+              <a:rPr lang="en-US" sz="3200" spc="-5" dirty="0">
+                <a:latin typeface="Calibri"/>
+                <a:cs typeface="Calibri"/>
+              </a:rPr>
+              <a:t> </a:t>
+            </a:r>
+            <a:r>
+              <a:rPr lang="en-US" sz="3200" dirty="0">
                 <a:latin typeface="Calibri"/>
                 <a:cs typeface="Calibri"/>
               </a:rPr>
               <a:t>assigns</a:t>
             </a:r>
             <a:r>
-              <a:rPr sz="3200" spc="15" dirty="0">
-                <a:latin typeface="Calibri"/>
-                <a:cs typeface="Calibri"/>
-              </a:rPr>
-              <a:t> </a:t>
-            </a:r>
-            <a:r>
-              <a:rPr sz="3200" spc="-10" dirty="0">
+              <a:rPr lang="en-US" sz="3200" spc="15" dirty="0">
+                <a:latin typeface="Calibri"/>
+                <a:cs typeface="Calibri"/>
+              </a:rPr>
+              <a:t> </a:t>
+            </a:r>
+            <a:r>
+              <a:rPr lang="en-US" sz="3200" spc="-10" dirty="0">
                 <a:latin typeface="Calibri"/>
                 <a:cs typeface="Calibri"/>
               </a:rPr>
               <a:t>processor</a:t>
             </a:r>
             <a:r>
-              <a:rPr sz="3200" spc="-30" dirty="0">
-                <a:latin typeface="Calibri"/>
-                <a:cs typeface="Calibri"/>
-              </a:rPr>
-              <a:t> </a:t>
-            </a:r>
-            <a:r>
-              <a:rPr sz="3200" spc="-25" dirty="0">
+              <a:rPr lang="en-US" sz="3200" spc="-30" dirty="0">
+                <a:latin typeface="Calibri"/>
+                <a:cs typeface="Calibri"/>
+              </a:rPr>
+              <a:t> </a:t>
+            </a:r>
+            <a:r>
+              <a:rPr lang="en-US" sz="3200" spc="-25" dirty="0">
                 <a:latin typeface="Calibri"/>
                 <a:cs typeface="Calibri"/>
               </a:rPr>
               <a:t>to</a:t>
             </a:r>
             <a:r>
-              <a:rPr sz="3200" spc="5" dirty="0">
-                <a:latin typeface="Calibri"/>
-                <a:cs typeface="Calibri"/>
-              </a:rPr>
-              <a:t> </a:t>
-            </a:r>
-            <a:r>
-              <a:rPr sz="3200" spc="-15" dirty="0">
+              <a:rPr lang="en-US" sz="3200" spc="5" dirty="0">
+                <a:latin typeface="Calibri"/>
+                <a:cs typeface="Calibri"/>
+              </a:rPr>
+              <a:t> </a:t>
+            </a:r>
+            <a:r>
+              <a:rPr lang="en-US" sz="3200" spc="-15" dirty="0">
                 <a:latin typeface="Calibri"/>
                 <a:cs typeface="Calibri"/>
               </a:rPr>
               <a:t>process </a:t>
             </a:r>
             <a:r>
-              <a:rPr sz="3200" spc="-710" dirty="0">
-                <a:latin typeface="Calibri"/>
-                <a:cs typeface="Calibri"/>
-              </a:rPr>
-              <a:t> </a:t>
-            </a:r>
-            <a:r>
-              <a:rPr sz="3200" dirty="0">
+              <a:rPr lang="en-US" sz="3200" spc="-710" dirty="0">
+                <a:latin typeface="Calibri"/>
+                <a:cs typeface="Calibri"/>
+              </a:rPr>
+              <a:t> </a:t>
+            </a:r>
+            <a:r>
+              <a:rPr lang="en-US" sz="3200" dirty="0">
                 <a:latin typeface="Calibri"/>
                 <a:cs typeface="Calibri"/>
               </a:rPr>
               <a:t>with</a:t>
             </a:r>
             <a:r>
-              <a:rPr sz="3200" spc="-20" dirty="0">
-                <a:latin typeface="Calibri"/>
-                <a:cs typeface="Calibri"/>
-              </a:rPr>
-              <a:t> </a:t>
-            </a:r>
-            <a:r>
-              <a:rPr sz="3200" spc="-5" dirty="0">
+              <a:rPr lang="en-US" sz="3200" spc="-20" dirty="0">
+                <a:latin typeface="Calibri"/>
+                <a:cs typeface="Calibri"/>
+              </a:rPr>
+              <a:t> </a:t>
+            </a:r>
+            <a:r>
+              <a:rPr lang="en-US" sz="3200" spc="-5" dirty="0">
                 <a:latin typeface="Calibri"/>
                 <a:cs typeface="Calibri"/>
               </a:rPr>
               <a:t>earliest</a:t>
             </a:r>
             <a:r>
-              <a:rPr sz="3200" dirty="0">
-                <a:latin typeface="Calibri"/>
-                <a:cs typeface="Calibri"/>
-              </a:rPr>
-              <a:t> </a:t>
-            </a:r>
-            <a:r>
-              <a:rPr sz="3200" spc="-5" dirty="0">
+              <a:rPr lang="en-US" sz="3200" dirty="0">
+                <a:latin typeface="Calibri"/>
+                <a:cs typeface="Calibri"/>
+              </a:rPr>
+              <a:t> </a:t>
+            </a:r>
+            <a:r>
+              <a:rPr lang="en-US" sz="3200" spc="-5" dirty="0">
                 <a:latin typeface="Calibri"/>
                 <a:cs typeface="Calibri"/>
               </a:rPr>
               <a:t>deadline.</a:t>
             </a:r>
-            <a:endParaRPr sz="3200" dirty="0">
+            <a:endParaRPr lang="en-US" sz="3200" dirty="0">
               <a:latin typeface="Calibri"/>
               <a:cs typeface="Calibri"/>
             </a:endParaRPr>
@@ -18476,62 +18617,62 @@
               </a:tabLst>
             </a:pPr>
             <a:r>
-              <a:rPr sz="2400" spc="-20" dirty="0">
+              <a:rPr lang="en-US" sz="2400" spc="-20" dirty="0">
                 <a:latin typeface="Calibri"/>
                 <a:cs typeface="Calibri"/>
               </a:rPr>
               <a:t>May</a:t>
             </a:r>
             <a:r>
-              <a:rPr sz="2400" spc="-25" dirty="0">
-                <a:latin typeface="Calibri"/>
-                <a:cs typeface="Calibri"/>
-              </a:rPr>
-              <a:t> </a:t>
-            </a:r>
-            <a:r>
-              <a:rPr sz="2400" spc="-10" dirty="0">
+              <a:rPr lang="en-US" sz="2400" spc="-25" dirty="0">
+                <a:latin typeface="Calibri"/>
+                <a:cs typeface="Calibri"/>
+              </a:rPr>
+              <a:t> </a:t>
+            </a:r>
+            <a:r>
+              <a:rPr lang="en-US" sz="2400" spc="-10" dirty="0">
                 <a:latin typeface="Calibri"/>
                 <a:cs typeface="Calibri"/>
               </a:rPr>
               <a:t>pre-empt</a:t>
             </a:r>
             <a:r>
-              <a:rPr sz="2400" spc="-5" dirty="0">
+              <a:rPr lang="en-US" sz="2400" spc="-5" dirty="0">
                 <a:latin typeface="Calibri"/>
                 <a:cs typeface="Calibri"/>
               </a:rPr>
               <a:t> other</a:t>
             </a:r>
             <a:r>
-              <a:rPr sz="2400" dirty="0">
-                <a:latin typeface="Calibri"/>
-                <a:cs typeface="Calibri"/>
-              </a:rPr>
-              <a:t> </a:t>
-            </a:r>
-            <a:r>
-              <a:rPr sz="2400" spc="-5" dirty="0">
+              <a:rPr lang="en-US" sz="2400" dirty="0">
+                <a:latin typeface="Calibri"/>
+                <a:cs typeface="Calibri"/>
+              </a:rPr>
+              <a:t> </a:t>
+            </a:r>
+            <a:r>
+              <a:rPr lang="en-US" sz="2400" spc="-5" dirty="0">
                 <a:latin typeface="Calibri"/>
                 <a:cs typeface="Calibri"/>
               </a:rPr>
               <a:t>real-time</a:t>
             </a:r>
             <a:r>
-              <a:rPr sz="2400" spc="-15" dirty="0">
-                <a:latin typeface="Calibri"/>
-                <a:cs typeface="Calibri"/>
-              </a:rPr>
-              <a:t> </a:t>
-            </a:r>
-            <a:r>
-              <a:rPr sz="2400" spc="-10" dirty="0">
+              <a:rPr lang="en-US" sz="2400" spc="-15" dirty="0">
+                <a:latin typeface="Calibri"/>
+                <a:cs typeface="Calibri"/>
+              </a:rPr>
+              <a:t> </a:t>
+            </a:r>
+            <a:r>
+              <a:rPr lang="en-US" sz="2400" spc="-10" dirty="0">
                 <a:latin typeface="Calibri"/>
                 <a:cs typeface="Calibri"/>
               </a:rPr>
               <a:t>processes</a:t>
             </a:r>
-            <a:endParaRPr sz="2400" dirty="0">
+            <a:endParaRPr lang="en-US" sz="2400" dirty="0">
               <a:latin typeface="Calibri"/>
               <a:cs typeface="Calibri"/>
             </a:endParaRPr>
@@ -18738,28 +18879,40 @@
               <a:t> </a:t>
             </a:r>
             <a:r>
-              <a:rPr sz="3200" spc="-10" dirty="0">
+              <a:rPr sz="3200" b="1" spc="-10" dirty="0">
+                <a:solidFill>
+                  <a:srgbClr val="00B050"/>
+                </a:solidFill>
                 <a:latin typeface="Calibri"/>
                 <a:cs typeface="Calibri"/>
               </a:rPr>
               <a:t>real-time</a:t>
             </a:r>
             <a:r>
-              <a:rPr sz="3200" spc="-5" dirty="0">
-                <a:latin typeface="Calibri"/>
-                <a:cs typeface="Calibri"/>
-              </a:rPr>
-              <a:t> </a:t>
-            </a:r>
-            <a:r>
-              <a:rPr sz="3200" spc="-30" dirty="0">
+              <a:rPr sz="3200" b="1" spc="-5" dirty="0">
+                <a:solidFill>
+                  <a:srgbClr val="00B050"/>
+                </a:solidFill>
+                <a:latin typeface="Calibri"/>
+                <a:cs typeface="Calibri"/>
+              </a:rPr>
+              <a:t> </a:t>
+            </a:r>
+            <a:r>
+              <a:rPr sz="3200" b="1" spc="-30" dirty="0">
+                <a:solidFill>
+                  <a:srgbClr val="00B050"/>
+                </a:solidFill>
                 <a:latin typeface="Calibri"/>
                 <a:cs typeface="Calibri"/>
               </a:rPr>
               <a:t>system</a:t>
             </a:r>
             <a:r>
-              <a:rPr sz="3200" spc="-25" dirty="0">
+              <a:rPr sz="3200" b="1" spc="-25" dirty="0">
+                <a:solidFill>
+                  <a:srgbClr val="00B050"/>
+                </a:solidFill>
                 <a:latin typeface="Calibri"/>
                 <a:cs typeface="Calibri"/>
               </a:rPr>
@@ -18945,21 +19098,30 @@
               <a:t>An </a:t>
             </a:r>
             <a:r>
-              <a:rPr sz="3200" dirty="0">
+              <a:rPr sz="3200" b="1" dirty="0">
+                <a:solidFill>
+                  <a:srgbClr val="00B050"/>
+                </a:solidFill>
                 <a:latin typeface="Calibri"/>
                 <a:cs typeface="Calibri"/>
               </a:rPr>
               <a:t>embedded </a:t>
             </a:r>
             <a:r>
-              <a:rPr sz="3200" spc="-30" dirty="0">
+              <a:rPr sz="3200" b="1" spc="-30" dirty="0">
+                <a:solidFill>
+                  <a:srgbClr val="00B050"/>
+                </a:solidFill>
                 <a:latin typeface="Calibri"/>
                 <a:cs typeface="Calibri"/>
               </a:rPr>
               <a:t>system</a:t>
             </a:r>
             <a:r>
-              <a:rPr sz="3200" spc="-25" dirty="0">
+              <a:rPr sz="3200" b="1" spc="-25" dirty="0">
+                <a:solidFill>
+                  <a:srgbClr val="00B050"/>
+                </a:solidFill>
                 <a:latin typeface="Calibri"/>
                 <a:cs typeface="Calibri"/>
               </a:rPr>
@@ -19080,139 +19242,178 @@
               <a:t>A </a:t>
             </a:r>
             <a:r>
+              <a:rPr sz="3200" b="1" spc="-15" dirty="0">
+                <a:solidFill>
+                  <a:srgbClr val="00B050"/>
+                </a:solidFill>
+                <a:latin typeface="Calibri"/>
+                <a:cs typeface="Calibri"/>
+              </a:rPr>
+              <a:t>safety-critical </a:t>
+            </a:r>
+            <a:r>
+              <a:rPr sz="3200" b="1" spc="-30" dirty="0">
+                <a:solidFill>
+                  <a:srgbClr val="00B050"/>
+                </a:solidFill>
+                <a:latin typeface="Calibri"/>
+                <a:cs typeface="Calibri"/>
+              </a:rPr>
+              <a:t>system </a:t>
+            </a:r>
+            <a:r>
+              <a:rPr sz="3200" spc="-5" dirty="0">
+                <a:latin typeface="Calibri"/>
+                <a:cs typeface="Calibri"/>
+              </a:rPr>
+              <a:t>is </a:t>
+            </a:r>
+            <a:r>
+              <a:rPr sz="3200" dirty="0">
+                <a:latin typeface="Calibri"/>
+                <a:cs typeface="Calibri"/>
+              </a:rPr>
+              <a:t>a </a:t>
+            </a:r>
+            <a:r>
+              <a:rPr sz="3200" spc="-10" dirty="0">
+                <a:latin typeface="Calibri"/>
+                <a:cs typeface="Calibri"/>
+              </a:rPr>
+              <a:t>real-time </a:t>
+            </a:r>
+            <a:r>
+              <a:rPr sz="3200" spc="-30" dirty="0">
+                <a:latin typeface="Calibri"/>
+                <a:cs typeface="Calibri"/>
+              </a:rPr>
+              <a:t>system </a:t>
+            </a:r>
+            <a:r>
+              <a:rPr sz="3200" spc="-25" dirty="0">
+                <a:latin typeface="Calibri"/>
+                <a:cs typeface="Calibri"/>
+              </a:rPr>
+              <a:t> </a:t>
+            </a:r>
+            <a:r>
+              <a:rPr sz="3200" dirty="0">
+                <a:latin typeface="Calibri"/>
+                <a:cs typeface="Calibri"/>
+              </a:rPr>
+              <a:t>with</a:t>
+            </a:r>
+            <a:r>
+              <a:rPr sz="3200" spc="-10" dirty="0">
+                <a:latin typeface="Calibri"/>
+                <a:cs typeface="Calibri"/>
+              </a:rPr>
+              <a:t> </a:t>
+            </a:r>
+            <a:r>
+              <a:rPr sz="3200" spc="-20" dirty="0">
+                <a:solidFill>
+                  <a:srgbClr val="C00000"/>
+                </a:solidFill>
+                <a:latin typeface="Calibri"/>
+                <a:cs typeface="Calibri"/>
+              </a:rPr>
+              <a:t>catastrophic</a:t>
+            </a:r>
+            <a:r>
+              <a:rPr sz="3200" spc="5" dirty="0">
+                <a:solidFill>
+                  <a:srgbClr val="C00000"/>
+                </a:solidFill>
+                <a:latin typeface="Calibri"/>
+                <a:cs typeface="Calibri"/>
+              </a:rPr>
+              <a:t> </a:t>
+            </a:r>
+            <a:r>
+              <a:rPr sz="3200" spc="-10" dirty="0">
+                <a:solidFill>
+                  <a:srgbClr val="C00000"/>
+                </a:solidFill>
+                <a:latin typeface="Calibri"/>
+                <a:cs typeface="Calibri"/>
+              </a:rPr>
+              <a:t>results</a:t>
+            </a:r>
+            <a:r>
               <a:rPr sz="3200" spc="-15" dirty="0">
-                <a:latin typeface="Calibri"/>
-                <a:cs typeface="Calibri"/>
-              </a:rPr>
-              <a:t>safety-critical </a:t>
-            </a:r>
-            <a:r>
-              <a:rPr sz="3200" spc="-30" dirty="0">
-                <a:latin typeface="Calibri"/>
-                <a:cs typeface="Calibri"/>
-              </a:rPr>
-              <a:t>system </a:t>
+                <a:solidFill>
+                  <a:srgbClr val="C00000"/>
+                </a:solidFill>
+                <a:latin typeface="Calibri"/>
+                <a:cs typeface="Calibri"/>
+              </a:rPr>
+              <a:t> </a:t>
             </a:r>
             <a:r>
               <a:rPr sz="3200" spc="-5" dirty="0">
-                <a:latin typeface="Calibri"/>
-                <a:cs typeface="Calibri"/>
-              </a:rPr>
-              <a:t>is </a:t>
+                <a:solidFill>
+                  <a:srgbClr val="C00000"/>
+                </a:solidFill>
+                <a:latin typeface="Calibri"/>
+                <a:cs typeface="Calibri"/>
+              </a:rPr>
+              <a:t>in</a:t>
+            </a:r>
+            <a:r>
+              <a:rPr sz="3200" spc="15" dirty="0">
+                <a:solidFill>
+                  <a:srgbClr val="C00000"/>
+                </a:solidFill>
+                <a:latin typeface="Calibri"/>
+                <a:cs typeface="Calibri"/>
+              </a:rPr>
+              <a:t> </a:t>
+            </a:r>
+            <a:r>
+              <a:rPr sz="3200" spc="-5" dirty="0">
+                <a:solidFill>
+                  <a:srgbClr val="C00000"/>
+                </a:solidFill>
+                <a:latin typeface="Calibri"/>
+                <a:cs typeface="Calibri"/>
+              </a:rPr>
+              <a:t>case</a:t>
+            </a:r>
+            <a:r>
+              <a:rPr sz="3200" spc="-20" dirty="0">
+                <a:solidFill>
+                  <a:srgbClr val="C00000"/>
+                </a:solidFill>
+                <a:latin typeface="Calibri"/>
+                <a:cs typeface="Calibri"/>
+              </a:rPr>
+              <a:t> </a:t>
             </a:r>
             <a:r>
               <a:rPr sz="3200" dirty="0">
-                <a:latin typeface="Calibri"/>
-                <a:cs typeface="Calibri"/>
-              </a:rPr>
-              <a:t>a </a:t>
-            </a:r>
-            <a:r>
-              <a:rPr sz="3200" spc="-10" dirty="0">
-                <a:latin typeface="Calibri"/>
-                <a:cs typeface="Calibri"/>
-              </a:rPr>
-              <a:t>real-time </a:t>
-            </a:r>
-            <a:r>
-              <a:rPr sz="3200" spc="-30" dirty="0">
-                <a:latin typeface="Calibri"/>
-                <a:cs typeface="Calibri"/>
-              </a:rPr>
-              <a:t>system </a:t>
-            </a:r>
-            <a:r>
-              <a:rPr sz="3200" spc="-25" dirty="0">
-                <a:latin typeface="Calibri"/>
-                <a:cs typeface="Calibri"/>
-              </a:rPr>
-              <a:t> </a:t>
-            </a:r>
-            <a:r>
-              <a:rPr sz="3200" dirty="0">
-                <a:latin typeface="Calibri"/>
-                <a:cs typeface="Calibri"/>
-              </a:rPr>
-              <a:t>with</a:t>
-            </a:r>
-            <a:r>
-              <a:rPr sz="3200" spc="-10" dirty="0">
-                <a:latin typeface="Calibri"/>
-                <a:cs typeface="Calibri"/>
-              </a:rPr>
-              <a:t> </a:t>
-            </a:r>
-            <a:r>
-              <a:rPr sz="3200" spc="-20" dirty="0">
-                <a:latin typeface="Calibri"/>
-                <a:cs typeface="Calibri"/>
-              </a:rPr>
-              <a:t>catastrophic</a:t>
-            </a:r>
-            <a:r>
-              <a:rPr sz="3200" spc="5" dirty="0">
-                <a:latin typeface="Calibri"/>
-                <a:cs typeface="Calibri"/>
-              </a:rPr>
-              <a:t> </a:t>
-            </a:r>
-            <a:r>
-              <a:rPr sz="3200" spc="-10" dirty="0">
-                <a:latin typeface="Calibri"/>
-                <a:cs typeface="Calibri"/>
-              </a:rPr>
-              <a:t>results</a:t>
+                <a:solidFill>
+                  <a:srgbClr val="C00000"/>
+                </a:solidFill>
+                <a:latin typeface="Calibri"/>
+                <a:cs typeface="Calibri"/>
+              </a:rPr>
+              <a:t>of </a:t>
             </a:r>
             <a:r>
               <a:rPr sz="3200" spc="-15" dirty="0">
-                <a:latin typeface="Calibri"/>
-                <a:cs typeface="Calibri"/>
-              </a:rPr>
-              <a:t> </a:t>
-            </a:r>
-            <a:r>
-              <a:rPr sz="3200" spc="-5" dirty="0">
-                <a:latin typeface="Calibri"/>
-                <a:cs typeface="Calibri"/>
-              </a:rPr>
-              <a:t>in</a:t>
-            </a:r>
-            <a:r>
-              <a:rPr sz="3200" spc="15" dirty="0">
-                <a:latin typeface="Calibri"/>
-                <a:cs typeface="Calibri"/>
-              </a:rPr>
-              <a:t> </a:t>
-            </a:r>
-            <a:r>
-              <a:rPr sz="3200" spc="-5" dirty="0">
-                <a:latin typeface="Calibri"/>
-                <a:cs typeface="Calibri"/>
-              </a:rPr>
-              <a:t>case</a:t>
-            </a:r>
-            <a:r>
-              <a:rPr sz="3200" spc="-20" dirty="0">
-                <a:latin typeface="Calibri"/>
-                <a:cs typeface="Calibri"/>
-              </a:rPr>
-              <a:t> </a:t>
-            </a:r>
-            <a:r>
-              <a:rPr sz="3200" dirty="0">
-                <a:latin typeface="Calibri"/>
-                <a:cs typeface="Calibri"/>
-              </a:rPr>
-              <a:t>of </a:t>
-            </a:r>
-            <a:r>
-              <a:rPr sz="3200" spc="-15" dirty="0">
+                <a:solidFill>
+                  <a:srgbClr val="C00000"/>
+                </a:solidFill>
                 <a:latin typeface="Calibri"/>
                 <a:cs typeface="Calibri"/>
               </a:rPr>
               <a:t>failure</a:t>
             </a:r>
             <a:endParaRPr sz="3200" dirty="0">
+              <a:solidFill>
+                <a:srgbClr val="C00000"/>
+              </a:solidFill>
               <a:latin typeface="Calibri"/>
               <a:cs typeface="Calibri"/>
             </a:endParaRPr>
@@ -19383,7 +19584,7 @@
               </a:rPr>
               <a:t>periodicity</a:t>
             </a:r>
-            <a:endParaRPr sz="2800">
+            <a:endParaRPr sz="2800" dirty="0">
               <a:latin typeface="Calibri"/>
               <a:cs typeface="Calibri"/>
             </a:endParaRPr>
@@ -19466,7 +19667,7 @@
               </a:rPr>
               <a:t>times</a:t>
             </a:r>
-            <a:endParaRPr sz="2800">
+            <a:endParaRPr sz="2800" dirty="0">
               <a:latin typeface="Calibri"/>
               <a:cs typeface="Calibri"/>
             </a:endParaRPr>
@@ -19482,7 +19683,7 @@
               <a:buFont typeface="Arial MT"/>
               <a:buChar char="•"/>
             </a:pPr>
-            <a:endParaRPr sz="3850">
+            <a:endParaRPr sz="3850" dirty="0">
               <a:latin typeface="Calibri"/>
               <a:cs typeface="Calibri"/>
             </a:endParaRPr>
@@ -19772,7 +19973,7 @@
               </a:rPr>
               <a:t>it.</a:t>
             </a:r>
-            <a:endParaRPr sz="2800">
+            <a:endParaRPr sz="2800" dirty="0">
               <a:latin typeface="Calibri"/>
               <a:cs typeface="Calibri"/>
             </a:endParaRPr>
@@ -20003,7 +20204,7 @@
               </a:rPr>
               <a:t>one.</a:t>
             </a:r>
-            <a:endParaRPr sz="2400">
+            <a:endParaRPr sz="2400" dirty="0">
               <a:latin typeface="Calibri"/>
               <a:cs typeface="Calibri"/>
             </a:endParaRPr>
@@ -20893,6 +21094,9 @@
             </a:pPr>
             <a:r>
               <a:rPr sz="2400" dirty="0">
+                <a:solidFill>
+                  <a:srgbClr val="00B050"/>
+                </a:solidFill>
                 <a:latin typeface="Calibri"/>
                 <a:cs typeface="Calibri"/>
               </a:rPr>
@@ -20900,6 +21104,9 @@
             </a:r>
             <a:r>
               <a:rPr sz="2400" spc="-20" dirty="0">
+                <a:solidFill>
+                  <a:srgbClr val="00B050"/>
+                </a:solidFill>
                 <a:latin typeface="Calibri"/>
                 <a:cs typeface="Calibri"/>
               </a:rPr>
@@ -20907,6 +21114,9 @@
             </a:r>
             <a:r>
               <a:rPr sz="2400" dirty="0">
+                <a:solidFill>
+                  <a:srgbClr val="00B050"/>
+                </a:solidFill>
                 <a:latin typeface="Calibri"/>
                 <a:cs typeface="Calibri"/>
               </a:rPr>
@@ -20914,6 +21124,9 @@
             </a:r>
             <a:r>
               <a:rPr sz="2400" spc="-20" dirty="0">
+                <a:solidFill>
+                  <a:srgbClr val="00B050"/>
+                </a:solidFill>
                 <a:latin typeface="Calibri"/>
                 <a:cs typeface="Calibri"/>
               </a:rPr>
@@ -20921,6 +21134,9 @@
             </a:r>
             <a:r>
               <a:rPr sz="2400" dirty="0">
+                <a:solidFill>
+                  <a:srgbClr val="00B050"/>
+                </a:solidFill>
                 <a:latin typeface="Calibri"/>
                 <a:cs typeface="Calibri"/>
               </a:rPr>
@@ -20928,6 +21144,9 @@
             </a:r>
             <a:r>
               <a:rPr sz="2400" spc="-20" dirty="0">
+                <a:solidFill>
+                  <a:srgbClr val="00B050"/>
+                </a:solidFill>
                 <a:latin typeface="Calibri"/>
                 <a:cs typeface="Calibri"/>
               </a:rPr>
@@ -20935,6 +21154,9 @@
             </a:r>
             <a:r>
               <a:rPr sz="2400" spc="-5" dirty="0">
+                <a:solidFill>
+                  <a:srgbClr val="00B050"/>
+                </a:solidFill>
                 <a:latin typeface="Calibri"/>
                 <a:cs typeface="Calibri"/>
               </a:rPr>
@@ -20942,6 +21164,9 @@
             </a:r>
             <a:r>
               <a:rPr sz="2400" spc="-15" dirty="0">
+                <a:solidFill>
+                  <a:srgbClr val="00B050"/>
+                </a:solidFill>
                 <a:latin typeface="Calibri"/>
                 <a:cs typeface="Calibri"/>
               </a:rPr>
@@ -20949,6 +21174,9 @@
             </a:r>
             <a:r>
               <a:rPr sz="2400" dirty="0">
+                <a:solidFill>
+                  <a:srgbClr val="00B050"/>
+                </a:solidFill>
                 <a:latin typeface="Calibri"/>
                 <a:cs typeface="Calibri"/>
               </a:rPr>
@@ -20956,6 +21184,9 @@
             </a:r>
             <a:r>
               <a:rPr sz="2400" spc="-10" dirty="0">
+                <a:solidFill>
+                  <a:srgbClr val="00B050"/>
+                </a:solidFill>
                 <a:latin typeface="Calibri"/>
                 <a:cs typeface="Calibri"/>
               </a:rPr>
@@ -20963,6 +21194,9 @@
             </a:r>
             <a:r>
               <a:rPr sz="2400" spc="-5" dirty="0">
+                <a:solidFill>
+                  <a:srgbClr val="00B050"/>
+                </a:solidFill>
                 <a:latin typeface="Calibri"/>
                 <a:cs typeface="Calibri"/>
               </a:rPr>
@@ -20970,6 +21204,9 @@
             </a:r>
             <a:r>
               <a:rPr sz="2400" spc="-25" dirty="0">
+                <a:solidFill>
+                  <a:srgbClr val="00B050"/>
+                </a:solidFill>
                 <a:latin typeface="Calibri"/>
                 <a:cs typeface="Calibri"/>
               </a:rPr>
@@ -20977,6 +21214,9 @@
             </a:r>
             <a:r>
               <a:rPr sz="2400" dirty="0">
+                <a:solidFill>
+                  <a:srgbClr val="00B050"/>
+                </a:solidFill>
                 <a:latin typeface="Calibri"/>
                 <a:cs typeface="Calibri"/>
               </a:rPr>
@@ -20984,6 +21224,9 @@
             </a:r>
             <a:r>
               <a:rPr sz="2400" spc="-10" dirty="0">
+                <a:solidFill>
+                  <a:srgbClr val="00B050"/>
+                </a:solidFill>
                 <a:latin typeface="Calibri"/>
                 <a:cs typeface="Calibri"/>
               </a:rPr>
@@ -20991,12 +21234,18 @@
             </a:r>
             <a:r>
               <a:rPr sz="2400" spc="-5" dirty="0">
+                <a:solidFill>
+                  <a:srgbClr val="00B050"/>
+                </a:solidFill>
                 <a:latin typeface="Calibri"/>
                 <a:cs typeface="Calibri"/>
               </a:rPr>
               <a:t>priority;</a:t>
             </a:r>
             <a:endParaRPr sz="2400" dirty="0">
+              <a:solidFill>
+                <a:srgbClr val="00B050"/>
+              </a:solidFill>
               <a:latin typeface="Calibri"/>
               <a:cs typeface="Calibri"/>
             </a:endParaRPr>
@@ -21017,6 +21266,9 @@
             </a:pPr>
             <a:r>
               <a:rPr sz="2400" dirty="0">
+                <a:solidFill>
+                  <a:srgbClr val="00B050"/>
+                </a:solidFill>
                 <a:latin typeface="Calibri"/>
                 <a:cs typeface="Calibri"/>
               </a:rPr>
@@ -21024,6 +21276,9 @@
             </a:r>
             <a:r>
               <a:rPr sz="2400" spc="-20" dirty="0">
+                <a:solidFill>
+                  <a:srgbClr val="00B050"/>
+                </a:solidFill>
                 <a:latin typeface="Calibri"/>
                 <a:cs typeface="Calibri"/>
               </a:rPr>
@@ -21031,6 +21286,9 @@
             </a:r>
             <a:r>
               <a:rPr sz="2400" spc="-10" dirty="0">
+                <a:solidFill>
+                  <a:srgbClr val="00B050"/>
+                </a:solidFill>
                 <a:latin typeface="Calibri"/>
                 <a:cs typeface="Calibri"/>
               </a:rPr>
@@ -21038,6 +21296,9 @@
             </a:r>
             <a:r>
               <a:rPr sz="2400" spc="-15" dirty="0">
+                <a:solidFill>
+                  <a:srgbClr val="00B050"/>
+                </a:solidFill>
                 <a:latin typeface="Calibri"/>
                 <a:cs typeface="Calibri"/>
               </a:rPr>
@@ -21045,6 +21306,9 @@
             </a:r>
             <a:r>
               <a:rPr sz="2400" dirty="0">
+                <a:solidFill>
+                  <a:srgbClr val="00B050"/>
+                </a:solidFill>
                 <a:latin typeface="Calibri"/>
                 <a:cs typeface="Calibri"/>
               </a:rPr>
@@ -21052,6 +21316,9 @@
             </a:r>
             <a:r>
               <a:rPr sz="2400" spc="-20" dirty="0">
+                <a:solidFill>
+                  <a:srgbClr val="00B050"/>
+                </a:solidFill>
                 <a:latin typeface="Calibri"/>
                 <a:cs typeface="Calibri"/>
               </a:rPr>
@@ -21059,6 +21326,9 @@
             </a:r>
             <a:r>
               <a:rPr sz="2400" spc="-5" dirty="0">
+                <a:solidFill>
+                  <a:srgbClr val="00B050"/>
+                </a:solidFill>
                 <a:latin typeface="Calibri"/>
                 <a:cs typeface="Calibri"/>
               </a:rPr>
@@ -21066,6 +21336,9 @@
             </a:r>
             <a:r>
               <a:rPr sz="2400" dirty="0">
+                <a:solidFill>
+                  <a:srgbClr val="00B050"/>
+                </a:solidFill>
                 <a:latin typeface="Calibri"/>
                 <a:cs typeface="Calibri"/>
               </a:rPr>
@@ -21073,6 +21346,9 @@
             </a:r>
             <a:r>
               <a:rPr sz="2400" spc="-5" dirty="0">
+                <a:solidFill>
+                  <a:srgbClr val="00B050"/>
+                </a:solidFill>
                 <a:latin typeface="Calibri"/>
                 <a:cs typeface="Calibri"/>
               </a:rPr>
@@ -21080,6 +21356,9 @@
             </a:r>
             <a:r>
               <a:rPr sz="2400" spc="-10" dirty="0">
+                <a:solidFill>
+                  <a:srgbClr val="00B050"/>
+                </a:solidFill>
                 <a:latin typeface="Calibri"/>
                 <a:cs typeface="Calibri"/>
               </a:rPr>
@@ -21087,6 +21366,9 @@
             </a:r>
             <a:r>
               <a:rPr sz="2400" spc="-5" dirty="0">
+                <a:solidFill>
+                  <a:srgbClr val="00B050"/>
+                </a:solidFill>
                 <a:latin typeface="Calibri"/>
                 <a:cs typeface="Calibri"/>
               </a:rPr>
@@ -21094,6 +21376,9 @@
             </a:r>
             <a:r>
               <a:rPr sz="2400" dirty="0">
+                <a:solidFill>
+                  <a:srgbClr val="00B050"/>
+                </a:solidFill>
                 <a:latin typeface="Calibri"/>
                 <a:cs typeface="Calibri"/>
               </a:rPr>
@@ -21101,6 +21386,9 @@
             </a:r>
             <a:r>
               <a:rPr sz="2400" spc="-15" dirty="0">
+                <a:solidFill>
+                  <a:srgbClr val="00B050"/>
+                </a:solidFill>
                 <a:latin typeface="Calibri"/>
                 <a:cs typeface="Calibri"/>
               </a:rPr>
@@ -21108,12 +21396,18 @@
             </a:r>
             <a:r>
               <a:rPr sz="2400" spc="-25" dirty="0">
+                <a:solidFill>
+                  <a:srgbClr val="00B050"/>
+                </a:solidFill>
                 <a:latin typeface="Calibri"/>
                 <a:cs typeface="Calibri"/>
               </a:rPr>
               <a:t>priority.</a:t>
             </a:r>
             <a:endParaRPr sz="2400" dirty="0">
+              <a:solidFill>
+                <a:srgbClr val="00B050"/>
+              </a:solidFill>
               <a:latin typeface="Calibri"/>
               <a:cs typeface="Calibri"/>
             </a:endParaRPr>
@@ -22243,7 +22537,7 @@
               </a:rPr>
               <a:t>purpose</a:t>
             </a:r>
-            <a:endParaRPr sz="3200">
+            <a:endParaRPr sz="3200" dirty="0">
               <a:latin typeface="Calibri"/>
               <a:cs typeface="Calibri"/>
             </a:endParaRPr>
@@ -22284,7 +22578,7 @@
               </a:rPr>
               <a:t>size</a:t>
             </a:r>
-            <a:endParaRPr sz="3200">
+            <a:endParaRPr sz="3200" dirty="0">
               <a:latin typeface="Calibri"/>
               <a:cs typeface="Calibri"/>
             </a:endParaRPr>
@@ -22325,7 +22619,7 @@
               </a:rPr>
               <a:t>mass-produced</a:t>
             </a:r>
-            <a:endParaRPr sz="3200">
+            <a:endParaRPr sz="3200" dirty="0">
               <a:latin typeface="Calibri"/>
               <a:cs typeface="Calibri"/>
             </a:endParaRPr>
@@ -22380,7 +22674,7 @@
               </a:rPr>
               <a:t>requirements</a:t>
             </a:r>
-            <a:endParaRPr sz="3200">
+            <a:endParaRPr sz="3200" dirty="0">
               <a:latin typeface="Calibri"/>
               <a:cs typeface="Calibri"/>
             </a:endParaRPr>
